--- a/nj2026_segmentation_AutumnSchool_FOR5547_ciliaAI.pptx
+++ b/nj2026_segmentation_AutumnSchool_FOR5547_ciliaAI.pptx
@@ -5245,7 +5245,12 @@
             <p:ph idx="1"/>
           </p:nvPr>
         </p:nvSpPr>
-        <p:spPr/>
+        <p:spPr>
+          <a:xfrm>
+            <a:off x="838200" y="1825625"/>
+            <a:ext cx="7208520" cy="4351338"/>
+          </a:xfrm>
+        </p:spPr>
         <p:txBody>
           <a:bodyPr>
             <a:normAutofit/>
@@ -5258,6 +5263,37 @@
             </a:r>
           </a:p>
           <a:p>
+            <a:pPr marL="0" indent="0">
+              <a:buNone/>
+            </a:pPr>
+            <a:r>
+              <a:rPr lang="en-US" dirty="0"/>
+              <a:t>Link to data: </a:t>
+            </a:r>
+          </a:p>
+          <a:p>
+            <a:pPr marL="0" indent="0">
+              <a:buNone/>
+            </a:pPr>
+            <a:r>
+              <a:rPr lang="en-US" dirty="0">
+                <a:hlinkClick r:id="rId2"/>
+              </a:rPr>
+              <a:t>https://uni-bonn.sciebo.de/s</a:t>
+            </a:r>
+            <a:r>
+              <a:rPr lang="en-US">
+                <a:hlinkClick r:id="rId2"/>
+              </a:rPr>
+              <a:t>/dYZ5Hkypz8YNTKi</a:t>
+            </a:r>
+            <a:r>
+              <a:rPr lang="en-US"/>
+              <a:t> </a:t>
+            </a:r>
+            <a:endParaRPr lang="en-US" dirty="0"/>
+          </a:p>
+          <a:p>
             <a:pPr lvl="1"/>
             <a:r>
               <a:rPr lang="en-US" dirty="0"/>
@@ -5300,6 +5336,36 @@
           </a:p>
         </p:txBody>
       </p:sp>
+      <p:pic>
+        <p:nvPicPr>
+          <p:cNvPr id="5" name="Picture 4">
+            <a:extLst>
+              <a:ext uri="{FF2B5EF4-FFF2-40B4-BE49-F238E27FC236}">
+                <a16:creationId xmlns:a16="http://schemas.microsoft.com/office/drawing/2014/main" id="{D026F525-7483-33C5-C968-715BFFB15D15}"/>
+              </a:ext>
+            </a:extLst>
+          </p:cNvPr>
+          <p:cNvPicPr>
+            <a:picLocks noChangeAspect="1"/>
+          </p:cNvPicPr>
+          <p:nvPr/>
+        </p:nvPicPr>
+        <p:blipFill>
+          <a:blip r:embed="rId3"/>
+          <a:stretch>
+            <a:fillRect/>
+          </a:stretch>
+        </p:blipFill>
+        <p:spPr>
+          <a:xfrm>
+            <a:off x="8362188" y="182245"/>
+            <a:ext cx="3623150" cy="4514088"/>
+          </a:xfrm>
+          <a:prstGeom prst="rect">
+            <a:avLst/>
+          </a:prstGeom>
+        </p:spPr>
+      </p:pic>
     </p:spTree>
     <p:extLst>
       <p:ext uri="{BB962C8B-B14F-4D97-AF65-F5344CB8AC3E}">
